--- a/templates/报告模板.pptx
+++ b/templates/报告模板.pptx
@@ -316,7 +316,7 @@
           <a:p>
             <a:fld id="{5BCAD085-E8A6-8845-BD4E-CB4CCA059FC4}" type="datetimeFigureOut">
               <a:rPr lang="en-US" smtClean="0"/>
-              <a:t>4/10/2026</a:t>
+              <a:t>4/11/2026</a:t>
             </a:fld>
             <a:endParaRPr lang="en-US"/>
           </a:p>
@@ -484,7 +484,7 @@
           <a:p>
             <a:fld id="{5BCAD085-E8A6-8845-BD4E-CB4CCA059FC4}" type="datetimeFigureOut">
               <a:rPr lang="en-US" smtClean="0"/>
-              <a:t>4/10/2026</a:t>
+              <a:t>4/11/2026</a:t>
             </a:fld>
             <a:endParaRPr lang="en-US"/>
           </a:p>
@@ -662,7 +662,7 @@
           <a:p>
             <a:fld id="{5BCAD085-E8A6-8845-BD4E-CB4CCA059FC4}" type="datetimeFigureOut">
               <a:rPr lang="en-US" smtClean="0"/>
-              <a:t>4/10/2026</a:t>
+              <a:t>4/11/2026</a:t>
             </a:fld>
             <a:endParaRPr lang="en-US"/>
           </a:p>
@@ -830,7 +830,7 @@
           <a:p>
             <a:fld id="{5BCAD085-E8A6-8845-BD4E-CB4CCA059FC4}" type="datetimeFigureOut">
               <a:rPr lang="en-US" smtClean="0"/>
-              <a:t>4/10/2026</a:t>
+              <a:t>4/11/2026</a:t>
             </a:fld>
             <a:endParaRPr lang="en-US"/>
           </a:p>
@@ -1075,7 +1075,7 @@
           <a:p>
             <a:fld id="{5BCAD085-E8A6-8845-BD4E-CB4CCA059FC4}" type="datetimeFigureOut">
               <a:rPr lang="en-US" smtClean="0"/>
-              <a:t>4/10/2026</a:t>
+              <a:t>4/11/2026</a:t>
             </a:fld>
             <a:endParaRPr lang="en-US"/>
           </a:p>
@@ -1360,7 +1360,7 @@
           <a:p>
             <a:fld id="{5BCAD085-E8A6-8845-BD4E-CB4CCA059FC4}" type="datetimeFigureOut">
               <a:rPr lang="en-US" smtClean="0"/>
-              <a:t>4/10/2026</a:t>
+              <a:t>4/11/2026</a:t>
             </a:fld>
             <a:endParaRPr lang="en-US"/>
           </a:p>
@@ -1779,7 +1779,7 @@
           <a:p>
             <a:fld id="{5BCAD085-E8A6-8845-BD4E-CB4CCA059FC4}" type="datetimeFigureOut">
               <a:rPr lang="en-US" smtClean="0"/>
-              <a:t>4/10/2026</a:t>
+              <a:t>4/11/2026</a:t>
             </a:fld>
             <a:endParaRPr lang="en-US"/>
           </a:p>
@@ -1896,7 +1896,7 @@
           <a:p>
             <a:fld id="{5BCAD085-E8A6-8845-BD4E-CB4CCA059FC4}" type="datetimeFigureOut">
               <a:rPr lang="en-US" smtClean="0"/>
-              <a:t>4/10/2026</a:t>
+              <a:t>4/11/2026</a:t>
             </a:fld>
             <a:endParaRPr lang="en-US"/>
           </a:p>
@@ -1991,7 +1991,7 @@
           <a:p>
             <a:fld id="{5BCAD085-E8A6-8845-BD4E-CB4CCA059FC4}" type="datetimeFigureOut">
               <a:rPr lang="en-US" smtClean="0"/>
-              <a:t>4/10/2026</a:t>
+              <a:t>4/11/2026</a:t>
             </a:fld>
             <a:endParaRPr lang="en-US"/>
           </a:p>
@@ -2266,7 +2266,7 @@
           <a:p>
             <a:fld id="{5BCAD085-E8A6-8845-BD4E-CB4CCA059FC4}" type="datetimeFigureOut">
               <a:rPr lang="en-US" smtClean="0"/>
-              <a:t>4/10/2026</a:t>
+              <a:t>4/11/2026</a:t>
             </a:fld>
             <a:endParaRPr lang="en-US"/>
           </a:p>
@@ -2518,7 +2518,7 @@
           <a:p>
             <a:fld id="{5BCAD085-E8A6-8845-BD4E-CB4CCA059FC4}" type="datetimeFigureOut">
               <a:rPr lang="en-US" smtClean="0"/>
-              <a:t>4/10/2026</a:t>
+              <a:t>4/11/2026</a:t>
             </a:fld>
             <a:endParaRPr lang="en-US"/>
           </a:p>
@@ -2729,7 +2729,7 @@
           <a:p>
             <a:fld id="{5BCAD085-E8A6-8845-BD4E-CB4CCA059FC4}" type="datetimeFigureOut">
               <a:rPr lang="en-US" smtClean="0"/>
-              <a:t>4/10/2026</a:t>
+              <a:t>4/11/2026</a:t>
             </a:fld>
             <a:endParaRPr lang="en-US"/>
           </a:p>
@@ -4935,8 +4935,8 @@
         </p:nvSpPr>
         <p:spPr>
           <a:xfrm>
-            <a:off x="457200" y="1371600"/>
-            <a:ext cx="7315200" cy="4114800"/>
+            <a:off x="279400" y="1261632"/>
+            <a:ext cx="7459133" cy="5300134"/>
           </a:xfrm>
           <a:prstGeom prst="rect">
             <a:avLst/>

--- a/templates/报告模板.pptx
+++ b/templates/报告模板.pptx
@@ -9,17 +9,18 @@
     <p:sldId id="257" r:id="rId3"/>
     <p:sldId id="258" r:id="rId4"/>
     <p:sldId id="259" r:id="rId5"/>
-    <p:sldId id="260" r:id="rId6"/>
-    <p:sldId id="261" r:id="rId7"/>
-    <p:sldId id="262" r:id="rId8"/>
-    <p:sldId id="263" r:id="rId9"/>
-    <p:sldId id="264" r:id="rId10"/>
-    <p:sldId id="265" r:id="rId11"/>
-    <p:sldId id="266" r:id="rId12"/>
-    <p:sldId id="267" r:id="rId13"/>
-    <p:sldId id="268" r:id="rId14"/>
-    <p:sldId id="269" r:id="rId15"/>
-    <p:sldId id="272" r:id="rId16"/>
+    <p:sldId id="273" r:id="rId6"/>
+    <p:sldId id="260" r:id="rId7"/>
+    <p:sldId id="261" r:id="rId8"/>
+    <p:sldId id="262" r:id="rId9"/>
+    <p:sldId id="263" r:id="rId10"/>
+    <p:sldId id="264" r:id="rId11"/>
+    <p:sldId id="265" r:id="rId12"/>
+    <p:sldId id="266" r:id="rId13"/>
+    <p:sldId id="267" r:id="rId14"/>
+    <p:sldId id="268" r:id="rId15"/>
+    <p:sldId id="269" r:id="rId16"/>
+    <p:sldId id="272" r:id="rId17"/>
   </p:sldIdLst>
   <p:sldSz cx="12192000" cy="6858000"/>
   <p:notesSz cx="6858000" cy="9144000"/>
@@ -3274,7 +3275,7 @@
         </p:nvSpPr>
         <p:spPr>
           <a:xfrm>
-            <a:off x="1981047" y="332148"/>
+            <a:off x="1981047" y="274638"/>
             <a:ext cx="8229600" cy="1143000"/>
           </a:xfrm>
         </p:spPr>
@@ -3284,7 +3285,15 @@
           <a:p>
             <a:r>
               <a:rPr dirty="0" err="1"/>
-              <a:t>异常订单专项排查与分析</a:t>
+              <a:t>销售员</a:t>
+            </a:r>
+            <a:r>
+              <a:rPr dirty="0"/>
+              <a:t> - </a:t>
+            </a:r>
+            <a:r>
+              <a:rPr dirty="0" err="1"/>
+              <a:t>产品销售能力矩阵分析</a:t>
             </a:r>
             <a:endParaRPr dirty="0"/>
           </a:p>
@@ -3292,14 +3301,70 @@
       </p:sp>
       <p:sp>
         <p:nvSpPr>
-          <p:cNvPr id="4" name="TABLE:abnormal_orders"/>
+          <p:cNvPr id="4" name="CHART:heatmap"/>
+          <p:cNvSpPr/>
+          <p:nvPr/>
+        </p:nvSpPr>
+        <p:spPr>
+          <a:xfrm>
+            <a:off x="457201" y="1371600"/>
+            <a:ext cx="7197306" cy="3657600"/>
+          </a:xfrm>
+          <a:prstGeom prst="rect">
+            <a:avLst/>
+          </a:prstGeom>
+          <a:solidFill>
+            <a:srgbClr val="ECF0F1"/>
+          </a:solidFill>
+          <a:ln>
+            <a:solidFill>
+              <a:srgbClr val="2E75B6"/>
+            </a:solidFill>
+          </a:ln>
+        </p:spPr>
+        <p:style>
+          <a:lnRef idx="1">
+            <a:schemeClr val="accent1"/>
+          </a:lnRef>
+          <a:fillRef idx="3">
+            <a:schemeClr val="accent1"/>
+          </a:fillRef>
+          <a:effectRef idx="2">
+            <a:schemeClr val="accent1"/>
+          </a:effectRef>
+          <a:fontRef idx="minor">
+            <a:schemeClr val="lt1"/>
+          </a:fontRef>
+        </p:style>
+        <p:txBody>
+          <a:bodyPr rtlCol="0" anchor="ctr"/>
+          <a:lstStyle/>
+          <a:p>
+            <a:r>
+              <a:rPr dirty="0"/>
+              <a:t>[</a:t>
+            </a:r>
+            <a:r>
+              <a:rPr dirty="0" err="1"/>
+              <a:t>CHART:heatmap</a:t>
+            </a:r>
+            <a:r>
+              <a:rPr dirty="0"/>
+              <a:t>]</a:t>
+            </a:r>
+          </a:p>
+        </p:txBody>
+      </p:sp>
+      <p:sp>
+        <p:nvSpPr>
+          <p:cNvPr id="5" name="TextBox 4"/>
           <p:cNvSpPr txBox="1"/>
           <p:nvPr/>
         </p:nvSpPr>
         <p:spPr>
           <a:xfrm>
-            <a:off x="457200" y="1371600"/>
-            <a:ext cx="11277295" cy="369332"/>
+            <a:off x="457200" y="5212080"/>
+            <a:ext cx="11277295" cy="1188720"/>
           </a:xfrm>
           <a:prstGeom prst="rect">
             <a:avLst/>
@@ -3307,49 +3372,23 @@
           <a:noFill/>
         </p:spPr>
         <p:txBody>
-          <a:bodyPr wrap="square">
-            <a:spAutoFit/>
-          </a:bodyPr>
-          <a:lstStyle/>
-          <a:p>
-            <a:r>
-              <a:rPr dirty="0"/>
-              <a:t>[</a:t>
-            </a:r>
-            <a:r>
-              <a:rPr dirty="0" err="1"/>
-              <a:t>TABLE:abnormal_orders</a:t>
-            </a:r>
-            <a:r>
-              <a:rPr dirty="0"/>
-              <a:t>]</a:t>
-            </a:r>
-          </a:p>
-        </p:txBody>
-      </p:sp>
-      <p:sp>
-        <p:nvSpPr>
-          <p:cNvPr id="5" name="TextBox 4"/>
-          <p:cNvSpPr txBox="1"/>
-          <p:nvPr/>
-        </p:nvSpPr>
-        <p:spPr>
-          <a:xfrm>
-            <a:off x="457200" y="4754880"/>
-            <a:ext cx="11277295" cy="1371600"/>
-          </a:xfrm>
-          <a:prstGeom prst="rect">
-            <a:avLst/>
-          </a:prstGeom>
-          <a:noFill/>
-        </p:spPr>
-        <p:txBody>
           <a:bodyPr wrap="none">
             <a:spAutoFit/>
           </a:bodyPr>
           <a:lstStyle/>
           <a:p>
-            <a:endParaRPr/>
+            <a:r>
+              <a:rPr dirty="0"/>
+              <a:t>{{</a:t>
+            </a:r>
+            <a:r>
+              <a:rPr dirty="0" err="1"/>
+              <a:t>INSIGHT:heatmap</a:t>
+            </a:r>
+            <a:r>
+              <a:rPr dirty="0"/>
+              <a:t>}}</a:t>
+            </a:r>
           </a:p>
         </p:txBody>
       </p:sp>
@@ -3380,14 +3419,42 @@
       </p:grpSpPr>
       <p:sp>
         <p:nvSpPr>
-          <p:cNvPr id="4" name="TextBox 3"/>
+          <p:cNvPr id="2" name="Title 1"/>
+          <p:cNvSpPr>
+            <a:spLocks noGrp="1"/>
+          </p:cNvSpPr>
+          <p:nvPr>
+            <p:ph type="title"/>
+          </p:nvPr>
+        </p:nvSpPr>
+        <p:spPr>
+          <a:xfrm>
+            <a:off x="1981047" y="332148"/>
+            <a:ext cx="8229600" cy="1143000"/>
+          </a:xfrm>
+        </p:spPr>
+        <p:txBody>
+          <a:bodyPr/>
+          <a:lstStyle/>
+          <a:p>
+            <a:r>
+              <a:rPr dirty="0" err="1"/>
+              <a:t>异常订单专项排查与分析</a:t>
+            </a:r>
+            <a:endParaRPr dirty="0"/>
+          </a:p>
+        </p:txBody>
+      </p:sp>
+      <p:sp>
+        <p:nvSpPr>
+          <p:cNvPr id="4" name="TABLE:abnormal_orders"/>
           <p:cNvSpPr txBox="1"/>
           <p:nvPr/>
         </p:nvSpPr>
         <p:spPr>
           <a:xfrm>
             <a:off x="457200" y="1371600"/>
-            <a:ext cx="11277295" cy="402546"/>
+            <a:ext cx="11277295" cy="369332"/>
           </a:xfrm>
           <a:prstGeom prst="rect">
             <a:avLst/>
@@ -3400,54 +3467,44 @@
           </a:bodyPr>
           <a:lstStyle/>
           <a:p>
-            <a:pPr>
-              <a:lnSpc>
-                <a:spcPct val="120000"/>
-              </a:lnSpc>
-              <a:spcAft>
-                <a:spcPts val="1200"/>
-              </a:spcAft>
-            </a:pPr>
             <a:r>
               <a:rPr dirty="0"/>
-              <a:t>{{</a:t>
+              <a:t>[</a:t>
             </a:r>
             <a:r>
               <a:rPr dirty="0" err="1"/>
-              <a:t>INSIGHT:conclusion</a:t>
+              <a:t>TABLE:abnormal_orders</a:t>
             </a:r>
             <a:r>
               <a:rPr dirty="0"/>
-              <a:t>}}</a:t>
-            </a:r>
-          </a:p>
-        </p:txBody>
-      </p:sp>
-      <p:sp>
-        <p:nvSpPr>
-          <p:cNvPr id="2" name="Title 1"/>
-          <p:cNvSpPr>
-            <a:spLocks noGrp="1"/>
-          </p:cNvSpPr>
-          <p:nvPr>
-            <p:ph type="title"/>
-          </p:nvPr>
-        </p:nvSpPr>
-        <p:spPr>
-          <a:xfrm>
-            <a:off x="1981047" y="319240"/>
-            <a:ext cx="8229600" cy="1143000"/>
-          </a:xfrm>
-        </p:spPr>
-        <p:txBody>
-          <a:bodyPr/>
-          <a:lstStyle/>
-          <a:p>
-            <a:r>
-              <a:rPr dirty="0" err="1"/>
-              <a:t>全量分析核心洞察结论</a:t>
-            </a:r>
-            <a:endParaRPr dirty="0"/>
+              <a:t>]</a:t>
+            </a:r>
+          </a:p>
+        </p:txBody>
+      </p:sp>
+      <p:sp>
+        <p:nvSpPr>
+          <p:cNvPr id="5" name="TextBox 4"/>
+          <p:cNvSpPr txBox="1"/>
+          <p:nvPr/>
+        </p:nvSpPr>
+        <p:spPr>
+          <a:xfrm>
+            <a:off x="457200" y="4754880"/>
+            <a:ext cx="11277295" cy="1371600"/>
+          </a:xfrm>
+          <a:prstGeom prst="rect">
+            <a:avLst/>
+          </a:prstGeom>
+          <a:noFill/>
+        </p:spPr>
+        <p:txBody>
+          <a:bodyPr wrap="none">
+            <a:spAutoFit/>
+          </a:bodyPr>
+          <a:lstStyle/>
+          <a:p>
+            <a:endParaRPr/>
           </a:p>
         </p:txBody>
       </p:sp>
@@ -3512,7 +3569,7 @@
             </a:r>
             <a:r>
               <a:rPr dirty="0" err="1"/>
-              <a:t>INSIGHT:strategy</a:t>
+              <a:t>INSIGHT:conclusion</a:t>
             </a:r>
             <a:r>
               <a:rPr dirty="0"/>
@@ -3533,7 +3590,7 @@
         </p:nvSpPr>
         <p:spPr>
           <a:xfrm>
-            <a:off x="1981047" y="284733"/>
+            <a:off x="1981047" y="319240"/>
             <a:ext cx="8229600" cy="1143000"/>
           </a:xfrm>
         </p:spPr>
@@ -3543,7 +3600,7 @@
           <a:p>
             <a:r>
               <a:rPr dirty="0" err="1"/>
-              <a:t>可落地销售优化策略建议</a:t>
+              <a:t>全量分析核心洞察结论</a:t>
             </a:r>
             <a:endParaRPr dirty="0"/>
           </a:p>
@@ -3576,42 +3633,14 @@
       </p:grpSpPr>
       <p:sp>
         <p:nvSpPr>
-          <p:cNvPr id="2" name="Title 1"/>
-          <p:cNvSpPr>
-            <a:spLocks noGrp="1"/>
-          </p:cNvSpPr>
-          <p:nvPr>
-            <p:ph type="ctrTitle"/>
-          </p:nvPr>
-        </p:nvSpPr>
-        <p:spPr>
-          <a:xfrm>
-            <a:off x="2209647" y="1973053"/>
-            <a:ext cx="7772400" cy="1470025"/>
-          </a:xfrm>
-        </p:spPr>
-        <p:txBody>
-          <a:bodyPr/>
-          <a:lstStyle/>
-          <a:p>
-            <a:r>
-              <a:rPr dirty="0" err="1"/>
-              <a:t>感谢观看</a:t>
-            </a:r>
-            <a:endParaRPr dirty="0"/>
-          </a:p>
-        </p:txBody>
-      </p:sp>
-      <p:sp>
-        <p:nvSpPr>
           <p:cNvPr id="4" name="TextBox 3"/>
           <p:cNvSpPr txBox="1"/>
           <p:nvPr/>
         </p:nvSpPr>
         <p:spPr>
           <a:xfrm>
-            <a:off x="4439444" y="5943600"/>
-            <a:ext cx="3313112" cy="307777"/>
+            <a:off x="457200" y="1371600"/>
+            <a:ext cx="11277295" cy="402546"/>
           </a:xfrm>
           <a:prstGeom prst="rect">
             <a:avLst/>
@@ -3624,24 +3653,52 @@
           </a:bodyPr>
           <a:lstStyle/>
           <a:p>
-            <a:pPr algn="ctr">
-              <a:defRPr sz="1400">
-                <a:solidFill>
-                  <a:srgbClr val="2C3E50"/>
-                </a:solidFill>
-              </a:defRPr>
+            <a:pPr>
+              <a:lnSpc>
+                <a:spcPct val="120000"/>
+              </a:lnSpc>
+              <a:spcAft>
+                <a:spcPts val="1200"/>
+              </a:spcAft>
             </a:pPr>
             <a:r>
-              <a:rPr lang="en-US" altLang="zh-CN" sz="1400" dirty="0"/>
-              <a:t>[</a:t>
-            </a:r>
-            <a:r>
-              <a:rPr lang="en-US" altLang="zh-CN" sz="1400" dirty="0" err="1"/>
-              <a:t>DATE:report_date</a:t>
-            </a:r>
-            <a:r>
-              <a:rPr lang="en-US" altLang="zh-CN" sz="1400" dirty="0"/>
-              <a:t>]</a:t>
+              <a:rPr dirty="0"/>
+              <a:t>{{</a:t>
+            </a:r>
+            <a:r>
+              <a:rPr dirty="0" err="1"/>
+              <a:t>INSIGHT:strategy</a:t>
+            </a:r>
+            <a:r>
+              <a:rPr dirty="0"/>
+              <a:t>}}</a:t>
+            </a:r>
+          </a:p>
+        </p:txBody>
+      </p:sp>
+      <p:sp>
+        <p:nvSpPr>
+          <p:cNvPr id="2" name="Title 1"/>
+          <p:cNvSpPr>
+            <a:spLocks noGrp="1"/>
+          </p:cNvSpPr>
+          <p:nvPr>
+            <p:ph type="title"/>
+          </p:nvPr>
+        </p:nvSpPr>
+        <p:spPr>
+          <a:xfrm>
+            <a:off x="1981047" y="284733"/>
+            <a:ext cx="8229600" cy="1143000"/>
+          </a:xfrm>
+        </p:spPr>
+        <p:txBody>
+          <a:bodyPr/>
+          <a:lstStyle/>
+          <a:p>
+            <a:r>
+              <a:rPr dirty="0" err="1"/>
+              <a:t>可落地销售优化策略建议</a:t>
             </a:r>
             <a:endParaRPr dirty="0"/>
           </a:p>
@@ -3674,6 +3731,104 @@
       </p:grpSpPr>
       <p:sp>
         <p:nvSpPr>
+          <p:cNvPr id="2" name="Title 1"/>
+          <p:cNvSpPr>
+            <a:spLocks noGrp="1"/>
+          </p:cNvSpPr>
+          <p:nvPr>
+            <p:ph type="ctrTitle"/>
+          </p:nvPr>
+        </p:nvSpPr>
+        <p:spPr>
+          <a:xfrm>
+            <a:off x="2209647" y="1973053"/>
+            <a:ext cx="7772400" cy="1470025"/>
+          </a:xfrm>
+        </p:spPr>
+        <p:txBody>
+          <a:bodyPr/>
+          <a:lstStyle/>
+          <a:p>
+            <a:r>
+              <a:rPr dirty="0" err="1"/>
+              <a:t>感谢观看</a:t>
+            </a:r>
+            <a:endParaRPr dirty="0"/>
+          </a:p>
+        </p:txBody>
+      </p:sp>
+      <p:sp>
+        <p:nvSpPr>
+          <p:cNvPr id="4" name="TextBox 3"/>
+          <p:cNvSpPr txBox="1"/>
+          <p:nvPr/>
+        </p:nvSpPr>
+        <p:spPr>
+          <a:xfrm>
+            <a:off x="4439444" y="5943600"/>
+            <a:ext cx="3313112" cy="307777"/>
+          </a:xfrm>
+          <a:prstGeom prst="rect">
+            <a:avLst/>
+          </a:prstGeom>
+          <a:noFill/>
+        </p:spPr>
+        <p:txBody>
+          <a:bodyPr wrap="square">
+            <a:spAutoFit/>
+          </a:bodyPr>
+          <a:lstStyle/>
+          <a:p>
+            <a:pPr algn="ctr">
+              <a:defRPr sz="1400">
+                <a:solidFill>
+                  <a:srgbClr val="2C3E50"/>
+                </a:solidFill>
+              </a:defRPr>
+            </a:pPr>
+            <a:r>
+              <a:rPr lang="en-US" altLang="zh-CN" sz="1400" dirty="0"/>
+              <a:t>[</a:t>
+            </a:r>
+            <a:r>
+              <a:rPr lang="en-US" altLang="zh-CN" sz="1400" dirty="0" err="1"/>
+              <a:t>DATE:report_date</a:t>
+            </a:r>
+            <a:r>
+              <a:rPr lang="en-US" altLang="zh-CN" sz="1400" dirty="0"/>
+              <a:t>]</a:t>
+            </a:r>
+            <a:endParaRPr dirty="0"/>
+          </a:p>
+        </p:txBody>
+      </p:sp>
+    </p:spTree>
+  </p:cSld>
+  <p:clrMapOvr>
+    <a:masterClrMapping/>
+  </p:clrMapOvr>
+</p:sld>
+</file>
+
+<file path=ppt/slides/slide15.xml><?xml version="1.0" encoding="utf-8"?>
+<p:sld xmlns:a="http://schemas.openxmlformats.org/drawingml/2006/main" xmlns:r="http://schemas.openxmlformats.org/officeDocument/2006/relationships" xmlns:p="http://schemas.openxmlformats.org/presentationml/2006/main">
+  <p:cSld>
+    <p:spTree>
+      <p:nvGrpSpPr>
+        <p:cNvPr id="1" name=""/>
+        <p:cNvGrpSpPr/>
+        <p:nvPr/>
+      </p:nvGrpSpPr>
+      <p:grpSpPr>
+        <a:xfrm>
+          <a:off x="0" y="0"/>
+          <a:ext cx="0" cy="0"/>
+          <a:chOff x="0" y="0"/>
+          <a:chExt cx="0" cy="0"/>
+        </a:xfrm>
+      </p:grpSpPr>
+      <p:sp>
+        <p:nvSpPr>
           <p:cNvPr id="5" name="文本框 4">
             <a:extLst>
               <a:ext uri="{FF2B5EF4-FFF2-40B4-BE49-F238E27FC236}">
@@ -3853,7 +4008,7 @@
 </p:sld>
 </file>
 
-<file path=ppt/slides/slide15.xml><?xml version="1.0" encoding="utf-8"?>
+<file path=ppt/slides/slide16.xml><?xml version="1.0" encoding="utf-8"?>
 <p:sld xmlns:a="http://schemas.openxmlformats.org/drawingml/2006/main" xmlns:r="http://schemas.openxmlformats.org/officeDocument/2006/relationships" xmlns:p="http://schemas.openxmlformats.org/presentationml/2006/main">
   <p:cSld>
     <p:spTree>
@@ -4424,6 +4579,92 @@
           </a:p>
         </p:txBody>
       </p:sp>
+      <p:graphicFrame>
+        <p:nvGraphicFramePr>
+          <p:cNvPr id="6" name="表格 5">
+            <a:extLst>
+              <a:ext uri="{FF2B5EF4-FFF2-40B4-BE49-F238E27FC236}">
+                <a16:creationId xmlns:a16="http://schemas.microsoft.com/office/drawing/2014/main" id="{9420EBFF-1D23-DB4B-2510-6867372F723C}"/>
+              </a:ext>
+            </a:extLst>
+          </p:cNvPr>
+          <p:cNvGraphicFramePr>
+            <a:graphicFrameLocks noGrp="1"/>
+          </p:cNvGraphicFramePr>
+          <p:nvPr>
+            <p:extLst>
+              <p:ext uri="{D42A27DB-BD31-4B8C-83A1-F6EECF244321}">
+                <p14:modId xmlns:p14="http://schemas.microsoft.com/office/powerpoint/2010/main" val="3709884782"/>
+              </p:ext>
+            </p:extLst>
+          </p:nvPr>
+        </p:nvGraphicFramePr>
+        <p:xfrm>
+          <a:off x="7399098" y="1812346"/>
+          <a:ext cx="2751667" cy="365760"/>
+        </p:xfrm>
+        <a:graphic>
+          <a:graphicData uri="http://schemas.openxmlformats.org/drawingml/2006/table">
+            <a:tbl>
+              <a:tblPr/>
+              <a:tblGrid>
+                <a:gridCol w="2751667">
+                  <a:extLst>
+                    <a:ext uri="{9D8B030D-6E8A-4147-A177-3AD203B41FA5}">
+                      <a16:colId xmlns:a16="http://schemas.microsoft.com/office/drawing/2014/main" val="2762140940"/>
+                    </a:ext>
+                  </a:extLst>
+                </a:gridCol>
+              </a:tblGrid>
+              <a:tr h="0">
+                <a:tc>
+                  <a:txBody>
+                    <a:bodyPr/>
+                    <a:lstStyle/>
+                    <a:p>
+                      <a:pPr>
+                        <a:buNone/>
+                      </a:pPr>
+                      <a:r>
+                        <a:rPr lang="en-US" dirty="0"/>
+                        <a:t>[</a:t>
+                      </a:r>
+                      <a:r>
+                        <a:rPr lang="en-US" dirty="0" err="1"/>
+                        <a:t>IMAGE:redhat</a:t>
+                      </a:r>
+                      <a:r>
+                        <a:rPr lang="en-US" dirty="0"/>
+                        <a:t>]</a:t>
+                      </a:r>
+                    </a:p>
+                  </a:txBody>
+                  <a:tcPr anchor="ctr">
+                    <a:lnL>
+                      <a:noFill/>
+                    </a:lnL>
+                    <a:lnR>
+                      <a:noFill/>
+                    </a:lnR>
+                    <a:lnT>
+                      <a:noFill/>
+                    </a:lnT>
+                    <a:lnB>
+                      <a:noFill/>
+                    </a:lnB>
+                    <a:noFill/>
+                  </a:tcPr>
+                </a:tc>
+                <a:extLst>
+                  <a:ext uri="{0D108BD9-81ED-4DB2-BD59-A6C34878D82A}">
+                    <a16:rowId xmlns:a16="http://schemas.microsoft.com/office/drawing/2014/main" val="2236706094"/>
+                  </a:ext>
+                </a:extLst>
+              </a:tr>
+            </a:tbl>
+          </a:graphicData>
+        </a:graphic>
+      </p:graphicFrame>
     </p:spTree>
   </p:cSld>
   <p:clrMapOvr>
@@ -4519,15 +4760,15 @@
           <a:lstStyle/>
           <a:p>
             <a:r>
-              <a:rPr dirty="0"/>
+              <a:rPr lang="en-US" dirty="0"/>
               <a:t>[</a:t>
             </a:r>
             <a:r>
-              <a:rPr dirty="0" err="1"/>
+              <a:rPr lang="en-US" dirty="0" err="1"/>
               <a:t>CHART:sales_by_person</a:t>
             </a:r>
             <a:r>
-              <a:rPr dirty="0"/>
+              <a:rPr lang="en-US" dirty="0"/>
               <a:t>]</a:t>
             </a:r>
           </a:p>
@@ -4601,98 +4842,20 @@
       </p:grpSpPr>
       <p:sp>
         <p:nvSpPr>
-          <p:cNvPr id="2" name="Title 1"/>
-          <p:cNvSpPr>
-            <a:spLocks noGrp="1"/>
-          </p:cNvSpPr>
-          <p:nvPr>
-            <p:ph type="title"/>
-          </p:nvPr>
-        </p:nvSpPr>
-        <p:spPr>
-          <a:xfrm>
-            <a:off x="1645920" y="278982"/>
-            <a:ext cx="8229600" cy="1143000"/>
-          </a:xfrm>
-        </p:spPr>
-        <p:txBody>
-          <a:bodyPr/>
-          <a:lstStyle/>
-          <a:p>
-            <a:r>
-              <a:rPr dirty="0" err="1"/>
-              <a:t>产品销售结构与占比分析</a:t>
-            </a:r>
-            <a:endParaRPr dirty="0"/>
-          </a:p>
-        </p:txBody>
-      </p:sp>
-      <p:sp>
-        <p:nvSpPr>
-          <p:cNvPr id="4" name="CHART:product_pie"/>
-          <p:cNvSpPr/>
-          <p:nvPr/>
-        </p:nvSpPr>
-        <p:spPr>
-          <a:xfrm>
-            <a:off x="457200" y="1371600"/>
-            <a:ext cx="5029200" cy="5029200"/>
-          </a:xfrm>
-          <a:prstGeom prst="rect">
-            <a:avLst/>
-          </a:prstGeom>
-          <a:solidFill>
-            <a:srgbClr val="ECF0F1"/>
-          </a:solidFill>
-          <a:ln>
-            <a:solidFill>
-              <a:srgbClr val="2E75B6"/>
-            </a:solidFill>
-          </a:ln>
-        </p:spPr>
-        <p:style>
-          <a:lnRef idx="1">
-            <a:schemeClr val="accent1"/>
-          </a:lnRef>
-          <a:fillRef idx="3">
-            <a:schemeClr val="accent1"/>
-          </a:fillRef>
-          <a:effectRef idx="2">
-            <a:schemeClr val="accent1"/>
-          </a:effectRef>
-          <a:fontRef idx="minor">
-            <a:schemeClr val="lt1"/>
-          </a:fontRef>
-        </p:style>
-        <p:txBody>
-          <a:bodyPr rtlCol="0" anchor="ctr"/>
-          <a:lstStyle/>
-          <a:p>
-            <a:r>
-              <a:rPr dirty="0"/>
-              <a:t>[</a:t>
-            </a:r>
-            <a:r>
-              <a:rPr dirty="0" err="1"/>
-              <a:t>CHART:product_pie</a:t>
-            </a:r>
-            <a:r>
-              <a:rPr dirty="0"/>
-              <a:t>]</a:t>
-            </a:r>
-          </a:p>
-        </p:txBody>
-      </p:sp>
-      <p:sp>
-        <p:nvSpPr>
-          <p:cNvPr id="5" name="TextBox 4"/>
+          <p:cNvPr id="6" name="文本框 5">
+            <a:extLst>
+              <a:ext uri="{FF2B5EF4-FFF2-40B4-BE49-F238E27FC236}">
+                <a16:creationId xmlns:a16="http://schemas.microsoft.com/office/drawing/2014/main" id="{26BDF351-D7B2-0A75-E9F2-0110C61C71F6}"/>
+              </a:ext>
+            </a:extLst>
+          </p:cNvPr>
           <p:cNvSpPr txBox="1"/>
           <p:nvPr/>
         </p:nvSpPr>
         <p:spPr>
           <a:xfrm>
-            <a:off x="5760720" y="1371600"/>
-            <a:ext cx="2437270" cy="369332"/>
+            <a:off x="756490" y="905270"/>
+            <a:ext cx="7332133" cy="5400000"/>
           </a:xfrm>
           <a:prstGeom prst="rect">
             <a:avLst/>
@@ -4700,31 +4863,44 @@
           <a:noFill/>
         </p:spPr>
         <p:txBody>
-          <a:bodyPr wrap="none">
+          <a:bodyPr wrap="square" anchor="ctr" anchorCtr="0">
             <a:spAutoFit/>
           </a:bodyPr>
           <a:lstStyle/>
           <a:p>
             <a:r>
-              <a:rPr dirty="0"/>
-              <a:t>{{</a:t>
-            </a:r>
-            <a:r>
-              <a:rPr dirty="0" err="1"/>
-              <a:t>INSIGHT:</a:t>
-            </a:r>
-            <a:r>
-              <a:rPr lang="en-US" dirty="0" err="1"/>
-              <a:t>product_pie</a:t>
-            </a:r>
-            <a:r>
-              <a:rPr dirty="0"/>
-              <a:t>}}</a:t>
+              <a:rPr lang="en-US" altLang="zh-CN" dirty="0">
+                <a:solidFill>
+                  <a:schemeClr val="accent1"/>
+                </a:solidFill>
+              </a:rPr>
+              <a:t>[</a:t>
+            </a:r>
+            <a:r>
+              <a:rPr lang="en-US" altLang="zh-CN" dirty="0" err="1">
+                <a:solidFill>
+                  <a:schemeClr val="accent1"/>
+                </a:solidFill>
+              </a:rPr>
+              <a:t>CHART:sales_by_person</a:t>
+            </a:r>
+            <a:r>
+              <a:rPr lang="en-US" altLang="zh-CN" dirty="0">
+                <a:solidFill>
+                  <a:schemeClr val="accent1"/>
+                </a:solidFill>
+              </a:rPr>
+              <a:t>]</a:t>
             </a:r>
           </a:p>
         </p:txBody>
       </p:sp>
     </p:spTree>
+    <p:extLst>
+      <p:ext uri="{BB962C8B-B14F-4D97-AF65-F5344CB8AC3E}">
+        <p14:creationId xmlns:p14="http://schemas.microsoft.com/office/powerpoint/2010/main" val="3541358607"/>
+      </p:ext>
+    </p:extLst>
   </p:cSld>
   <p:clrMapOvr>
     <a:masterClrMapping/>
@@ -4761,7 +4937,7 @@
         </p:nvSpPr>
         <p:spPr>
           <a:xfrm>
-            <a:off x="1981200" y="250196"/>
+            <a:off x="1645920" y="278982"/>
             <a:ext cx="8229600" cy="1143000"/>
           </a:xfrm>
         </p:spPr>
@@ -4771,7 +4947,7 @@
           <a:p>
             <a:r>
               <a:rPr dirty="0" err="1"/>
-              <a:t>福建各城市销售业绩排名</a:t>
+              <a:t>产品销售结构与占比分析</a:t>
             </a:r>
             <a:endParaRPr dirty="0"/>
           </a:p>
@@ -4779,14 +4955,14 @@
       </p:sp>
       <p:sp>
         <p:nvSpPr>
-          <p:cNvPr id="4" name="CHART:city_ranking"/>
+          <p:cNvPr id="4" name="CHART:product_pie"/>
           <p:cNvSpPr/>
           <p:nvPr/>
         </p:nvSpPr>
         <p:spPr>
           <a:xfrm>
             <a:off x="457200" y="1371600"/>
-            <a:ext cx="7315200" cy="4114800"/>
+            <a:ext cx="5029200" cy="5029200"/>
           </a:xfrm>
           <a:prstGeom prst="rect">
             <a:avLst/>
@@ -4824,7 +5000,7 @@
             </a:r>
             <a:r>
               <a:rPr dirty="0" err="1"/>
-              <a:t>CHART:city_ranking</a:t>
+              <a:t>CHART:product_pie</a:t>
             </a:r>
             <a:r>
               <a:rPr dirty="0"/>
@@ -4841,8 +5017,8 @@
         </p:nvSpPr>
         <p:spPr>
           <a:xfrm>
-            <a:off x="8046720" y="1371600"/>
-            <a:ext cx="2436244" cy="369332"/>
+            <a:off x="5760720" y="1371600"/>
+            <a:ext cx="2437270" cy="369332"/>
           </a:xfrm>
           <a:prstGeom prst="rect">
             <a:avLst/>
@@ -4865,7 +5041,7 @@
             </a:r>
             <a:r>
               <a:rPr lang="en-US" dirty="0" err="1"/>
-              <a:t>city_ranking</a:t>
+              <a:t>product_pie</a:t>
             </a:r>
             <a:r>
               <a:rPr dirty="0"/>
@@ -4911,7 +5087,7 @@
         </p:nvSpPr>
         <p:spPr>
           <a:xfrm>
-            <a:off x="1981200" y="296234"/>
+            <a:off x="1981200" y="250196"/>
             <a:ext cx="8229600" cy="1143000"/>
           </a:xfrm>
         </p:spPr>
@@ -4921,7 +5097,7 @@
           <a:p>
             <a:r>
               <a:rPr dirty="0" err="1"/>
-              <a:t>新老客销售贡献对比分析</a:t>
+              <a:t>福建各城市销售业绩排名</a:t>
             </a:r>
             <a:endParaRPr dirty="0"/>
           </a:p>
@@ -4929,14 +5105,14 @@
       </p:sp>
       <p:sp>
         <p:nvSpPr>
-          <p:cNvPr id="4" name="CHART:customer_comparison"/>
+          <p:cNvPr id="4" name="CHART:city_ranking"/>
           <p:cNvSpPr/>
           <p:nvPr/>
         </p:nvSpPr>
         <p:spPr>
           <a:xfrm>
-            <a:off x="279400" y="1261632"/>
-            <a:ext cx="7459133" cy="5300134"/>
+            <a:off x="457200" y="1371600"/>
+            <a:ext cx="7315200" cy="4114800"/>
           </a:xfrm>
           <a:prstGeom prst="rect">
             <a:avLst/>
@@ -4974,7 +5150,7 @@
             </a:r>
             <a:r>
               <a:rPr dirty="0" err="1"/>
-              <a:t>CHART:customer_comparison</a:t>
+              <a:t>CHART:city_ranking</a:t>
             </a:r>
             <a:r>
               <a:rPr dirty="0"/>
@@ -4992,7 +5168,7 @@
         <p:spPr>
           <a:xfrm>
             <a:off x="8046720" y="1371600"/>
-            <a:ext cx="3392852" cy="369332"/>
+            <a:ext cx="2436244" cy="369332"/>
           </a:xfrm>
           <a:prstGeom prst="rect">
             <a:avLst/>
@@ -5015,7 +5191,7 @@
             </a:r>
             <a:r>
               <a:rPr lang="en-US" dirty="0" err="1"/>
-              <a:t>customer_comparison</a:t>
+              <a:t>city_ranking</a:t>
             </a:r>
             <a:r>
               <a:rPr dirty="0"/>
@@ -5051,72 +5227,27 @@
       </p:grpSpPr>
       <p:sp>
         <p:nvSpPr>
-          <p:cNvPr id="5" name="TextBox 4"/>
-          <p:cNvSpPr txBox="1"/>
-          <p:nvPr/>
-        </p:nvSpPr>
-        <p:spPr>
-          <a:xfrm>
-            <a:off x="457200" y="5212080"/>
-            <a:ext cx="9544556" cy="369332"/>
-          </a:xfrm>
-          <a:prstGeom prst="rect">
-            <a:avLst/>
-          </a:prstGeom>
-          <a:noFill/>
-        </p:spPr>
-        <p:txBody>
-          <a:bodyPr wrap="square">
-            <a:spAutoFit/>
-          </a:bodyPr>
-          <a:lstStyle/>
-          <a:p>
-            <a:r>
-              <a:rPr dirty="0"/>
-              <a:t>{{</a:t>
-            </a:r>
+          <p:cNvPr id="2" name="Title 1"/>
+          <p:cNvSpPr>
+            <a:spLocks noGrp="1"/>
+          </p:cNvSpPr>
+          <p:nvPr>
+            <p:ph type="title"/>
+          </p:nvPr>
+        </p:nvSpPr>
+        <p:spPr>
+          <a:xfrm>
+            <a:off x="1981200" y="296234"/>
+            <a:ext cx="8229600" cy="1143000"/>
+          </a:xfrm>
+        </p:spPr>
+        <p:txBody>
+          <a:bodyPr/>
+          <a:lstStyle/>
+          <a:p>
             <a:r>
               <a:rPr dirty="0" err="1"/>
-              <a:t>INSIGHT:</a:t>
-            </a:r>
-            <a:r>
-              <a:rPr lang="en-US" dirty="0" err="1"/>
-              <a:t>monthly_trend</a:t>
-            </a:r>
-            <a:r>
-              <a:rPr dirty="0"/>
-              <a:t>}}</a:t>
-            </a:r>
-          </a:p>
-        </p:txBody>
-      </p:sp>
-      <p:sp>
-        <p:nvSpPr>
-          <p:cNvPr id="2" name="Title 1"/>
-          <p:cNvSpPr>
-            <a:spLocks noGrp="1"/>
-          </p:cNvSpPr>
-          <p:nvPr>
-            <p:ph type="title"/>
-          </p:nvPr>
-        </p:nvSpPr>
-        <p:spPr>
-          <a:xfrm>
-            <a:off x="1981047" y="296234"/>
-            <a:ext cx="8229600" cy="1143000"/>
-          </a:xfrm>
-        </p:spPr>
-        <p:txBody>
-          <a:bodyPr/>
-          <a:lstStyle/>
-          <a:p>
-            <a:r>
-              <a:rPr dirty="0"/>
-              <a:t>2022 </a:t>
-            </a:r>
-            <a:r>
-              <a:rPr dirty="0" err="1"/>
-              <a:t>年上半年销售趋势分析</a:t>
+              <a:t>新老客销售贡献对比分析</a:t>
             </a:r>
             <a:endParaRPr dirty="0"/>
           </a:p>
@@ -5124,14 +5255,14 @@
       </p:sp>
       <p:sp>
         <p:nvSpPr>
-          <p:cNvPr id="4" name="CHART:monthly_trend"/>
+          <p:cNvPr id="4" name="CHART:customer_comparison"/>
           <p:cNvSpPr/>
           <p:nvPr/>
         </p:nvSpPr>
         <p:spPr>
           <a:xfrm>
-            <a:off x="457200" y="1371600"/>
-            <a:ext cx="7973683" cy="3657600"/>
+            <a:off x="279400" y="1261632"/>
+            <a:ext cx="7459133" cy="5300134"/>
           </a:xfrm>
           <a:prstGeom prst="rect">
             <a:avLst/>
@@ -5169,11 +5300,52 @@
             </a:r>
             <a:r>
               <a:rPr dirty="0" err="1"/>
-              <a:t>CHART:monthly_trend</a:t>
+              <a:t>CHART:customer_comparison</a:t>
             </a:r>
             <a:r>
               <a:rPr dirty="0"/>
               <a:t>]</a:t>
+            </a:r>
+          </a:p>
+        </p:txBody>
+      </p:sp>
+      <p:sp>
+        <p:nvSpPr>
+          <p:cNvPr id="5" name="TextBox 4"/>
+          <p:cNvSpPr txBox="1"/>
+          <p:nvPr/>
+        </p:nvSpPr>
+        <p:spPr>
+          <a:xfrm>
+            <a:off x="8046720" y="1371600"/>
+            <a:ext cx="3392852" cy="369332"/>
+          </a:xfrm>
+          <a:prstGeom prst="rect">
+            <a:avLst/>
+          </a:prstGeom>
+          <a:noFill/>
+        </p:spPr>
+        <p:txBody>
+          <a:bodyPr wrap="none">
+            <a:spAutoFit/>
+          </a:bodyPr>
+          <a:lstStyle/>
+          <a:p>
+            <a:r>
+              <a:rPr dirty="0"/>
+              <a:t>{{</a:t>
+            </a:r>
+            <a:r>
+              <a:rPr dirty="0" err="1"/>
+              <a:t>INSIGHT:</a:t>
+            </a:r>
+            <a:r>
+              <a:rPr lang="en-US" dirty="0" err="1"/>
+              <a:t>customer_comparison</a:t>
+            </a:r>
+            <a:r>
+              <a:rPr dirty="0"/>
+              <a:t>}}</a:t>
             </a:r>
           </a:p>
         </p:txBody>
@@ -5205,6 +5377,47 @@
       </p:grpSpPr>
       <p:sp>
         <p:nvSpPr>
+          <p:cNvPr id="5" name="TextBox 4"/>
+          <p:cNvSpPr txBox="1"/>
+          <p:nvPr/>
+        </p:nvSpPr>
+        <p:spPr>
+          <a:xfrm>
+            <a:off x="457200" y="5212080"/>
+            <a:ext cx="9544556" cy="369332"/>
+          </a:xfrm>
+          <a:prstGeom prst="rect">
+            <a:avLst/>
+          </a:prstGeom>
+          <a:noFill/>
+        </p:spPr>
+        <p:txBody>
+          <a:bodyPr wrap="square">
+            <a:spAutoFit/>
+          </a:bodyPr>
+          <a:lstStyle/>
+          <a:p>
+            <a:r>
+              <a:rPr dirty="0"/>
+              <a:t>{{</a:t>
+            </a:r>
+            <a:r>
+              <a:rPr dirty="0" err="1"/>
+              <a:t>INSIGHT:</a:t>
+            </a:r>
+            <a:r>
+              <a:rPr lang="en-US" dirty="0" err="1"/>
+              <a:t>monthly_trend</a:t>
+            </a:r>
+            <a:r>
+              <a:rPr dirty="0"/>
+              <a:t>}}</a:t>
+            </a:r>
+          </a:p>
+        </p:txBody>
+      </p:sp>
+      <p:sp>
+        <p:nvSpPr>
           <p:cNvPr id="2" name="Title 1"/>
           <p:cNvSpPr>
             <a:spLocks noGrp="1"/>
@@ -5215,7 +5428,7 @@
         </p:nvSpPr>
         <p:spPr>
           <a:xfrm>
-            <a:off x="1981047" y="274638"/>
+            <a:off x="1981047" y="296234"/>
             <a:ext cx="8229600" cy="1143000"/>
           </a:xfrm>
         </p:spPr>
@@ -5224,16 +5437,12 @@
           <a:lstStyle/>
           <a:p>
             <a:r>
+              <a:rPr dirty="0"/>
+              <a:t>2022 </a:t>
+            </a:r>
+            <a:r>
               <a:rPr dirty="0" err="1"/>
-              <a:t>销售员</a:t>
-            </a:r>
-            <a:r>
-              <a:rPr dirty="0"/>
-              <a:t> - </a:t>
-            </a:r>
-            <a:r>
-              <a:rPr dirty="0" err="1"/>
-              <a:t>产品销售能力矩阵分析</a:t>
+              <a:t>年上半年销售趋势分析</a:t>
             </a:r>
             <a:endParaRPr dirty="0"/>
           </a:p>
@@ -5241,14 +5450,14 @@
       </p:sp>
       <p:sp>
         <p:nvSpPr>
-          <p:cNvPr id="4" name="CHART:heatmap"/>
+          <p:cNvPr id="4" name="CHART:monthly_trend"/>
           <p:cNvSpPr/>
           <p:nvPr/>
         </p:nvSpPr>
         <p:spPr>
           <a:xfrm>
-            <a:off x="457201" y="1371600"/>
-            <a:ext cx="7197306" cy="3657600"/>
+            <a:off x="457200" y="1371600"/>
+            <a:ext cx="7973683" cy="3657600"/>
           </a:xfrm>
           <a:prstGeom prst="rect">
             <a:avLst/>
@@ -5286,48 +5495,11 @@
             </a:r>
             <a:r>
               <a:rPr dirty="0" err="1"/>
-              <a:t>CHART:heatmap</a:t>
+              <a:t>CHART:monthly_trend</a:t>
             </a:r>
             <a:r>
               <a:rPr dirty="0"/>
               <a:t>]</a:t>
-            </a:r>
-          </a:p>
-        </p:txBody>
-      </p:sp>
-      <p:sp>
-        <p:nvSpPr>
-          <p:cNvPr id="5" name="TextBox 4"/>
-          <p:cNvSpPr txBox="1"/>
-          <p:nvPr/>
-        </p:nvSpPr>
-        <p:spPr>
-          <a:xfrm>
-            <a:off x="457200" y="5212080"/>
-            <a:ext cx="11277295" cy="1188720"/>
-          </a:xfrm>
-          <a:prstGeom prst="rect">
-            <a:avLst/>
-          </a:prstGeom>
-          <a:noFill/>
-        </p:spPr>
-        <p:txBody>
-          <a:bodyPr wrap="none">
-            <a:spAutoFit/>
-          </a:bodyPr>
-          <a:lstStyle/>
-          <a:p>
-            <a:r>
-              <a:rPr dirty="0"/>
-              <a:t>{{</a:t>
-            </a:r>
-            <a:r>
-              <a:rPr dirty="0" err="1"/>
-              <a:t>INSIGHT:heatmap</a:t>
-            </a:r>
-            <a:r>
-              <a:rPr dirty="0"/>
-              <a:t>}}</a:t>
             </a:r>
           </a:p>
         </p:txBody>
